--- a/morning-registration-activities/form-time-quiz/downloads/Form_Time_Quiz_Year_7_to_9.pptx
+++ b/morning-registration-activities/form-time-quiz/downloads/Form_Time_Quiz_Year_7_to_9.pptx
@@ -12028,7 +12028,7 @@
                 </a:solidFill>
                 <a:latin typeface="Karla"/>
               </a:rPr>
-              <a:t>Volume Two is coming soon to thepastoralguide.com.</a:t>
+              <a:t>Volume Two is available now at thepastoralguide.com.</a:t>
             </a:r>
           </a:p>
         </p:txBody>

--- a/morning-registration-activities/form-time-quiz/downloads/Form_Time_Quiz_Year_7_to_9.pptx
+++ b/morning-registration-activities/form-time-quiz/downloads/Form_Time_Quiz_Year_7_to_9.pptx
@@ -3193,7 +3193,7 @@
                 <a:solidFill>
                   <a:srgbClr val="974F16"/>
                 </a:solidFill>
-                <a:latin typeface="Karla"/>
+                <a:latin typeface="Calibri"/>
               </a:rPr>
               <a:t>MORNING REGISTRATION ACTIVITIES</a:t>
             </a:r>
@@ -3231,11 +3231,11 @@
               </a:spcAft>
             </a:pPr>
             <a:r>
-              <a:rPr sz="3000" b="1" i="0">
+              <a:rPr sz="3000" b="0" i="0">
                 <a:solidFill>
                   <a:srgbClr val="974F16"/>
                 </a:solidFill>
-                <a:latin typeface="Libre Caslon Display"/>
+                <a:latin typeface="Georgia"/>
               </a:rPr>
               <a:t>The Form Time Quiz</a:t>
             </a:r>
@@ -3290,7 +3290,7 @@
                 <a:solidFill>
                   <a:srgbClr val="FFFDF7"/>
                 </a:solidFill>
-                <a:latin typeface="Karla"/>
+                <a:latin typeface="Calibri"/>
               </a:rPr>
               <a:t>VOLUME ONE  ·  YEAR 7 TO 9</a:t>
             </a:r>
@@ -3332,7 +3332,7 @@
                 <a:solidFill>
                   <a:srgbClr val="5C6552"/>
                 </a:solidFill>
-                <a:latin typeface="Karla"/>
+                <a:latin typeface="Calibri"/>
               </a:rPr>
               <a:t>Ten questions: six on healthy habits, then four of general knowledge.</a:t>
             </a:r>
@@ -3482,11 +3482,11 @@
               </a:spcAft>
             </a:pPr>
             <a:r>
-              <a:rPr sz="1350" b="1" i="0">
+              <a:rPr sz="1350" b="0" i="0">
                 <a:solidFill>
                   <a:srgbClr val="974F16"/>
                 </a:solidFill>
-                <a:latin typeface="Libre Caslon Display"/>
+                <a:latin typeface="Georgia"/>
               </a:rPr>
               <a:t>Get into teams</a:t>
             </a:r>
@@ -3528,7 +3528,7 @@
                 <a:solidFill>
                   <a:srgbClr val="5C6552"/>
                 </a:solidFill>
-                <a:latin typeface="Karla"/>
+                <a:latin typeface="Calibri"/>
               </a:rPr>
               <a:t>Three or four to a team, with one answer sheet between you.</a:t>
             </a:r>
@@ -3678,11 +3678,11 @@
               </a:spcAft>
             </a:pPr>
             <a:r>
-              <a:rPr sz="1350" b="1" i="0">
+              <a:rPr sz="1350" b="0" i="0">
                 <a:solidFill>
                   <a:srgbClr val="974F16"/>
                 </a:solidFill>
-                <a:latin typeface="Libre Caslon Display"/>
+                <a:latin typeface="Georgia"/>
               </a:rPr>
               <a:t>Answer together</a:t>
             </a:r>
@@ -3724,7 +3724,7 @@
                 <a:solidFill>
                   <a:srgbClr val="5C6552"/>
                 </a:solidFill>
-                <a:latin typeface="Karla"/>
+                <a:latin typeface="Calibri"/>
               </a:rPr>
               <a:t>Each question goes up on the board. Agree an answer, then write it down.</a:t>
             </a:r>
@@ -3874,11 +3874,11 @@
               </a:spcAft>
             </a:pPr>
             <a:r>
-              <a:rPr sz="1350" b="1" i="0">
+              <a:rPr sz="1350" b="0" i="0">
                 <a:solidFill>
                   <a:srgbClr val="974F16"/>
                 </a:solidFill>
-                <a:latin typeface="Libre Caslon Display"/>
+                <a:latin typeface="Georgia"/>
               </a:rPr>
               <a:t>Swap and mark</a:t>
             </a:r>
@@ -3920,7 +3920,7 @@
                 <a:solidFill>
                   <a:srgbClr val="5C6552"/>
                 </a:solidFill>
-                <a:latin typeface="Karla"/>
+                <a:latin typeface="Calibri"/>
               </a:rPr>
               <a:t>Swap sheets with the team next to you, then the answers go up one at a time.</a:t>
             </a:r>
@@ -3962,7 +3962,7 @@
                 <a:solidFill>
                   <a:srgbClr val="8B9179"/>
                 </a:solidFill>
-                <a:latin typeface="Karla"/>
+                <a:latin typeface="Calibri"/>
               </a:rPr>
               <a:t>Needs: one answer sheet per team, from the resource pack.</a:t>
             </a:r>
@@ -4028,7 +4028,7 @@
                 <a:solidFill>
                   <a:srgbClr val="8B9179"/>
                 </a:solidFill>
-                <a:latin typeface="Karla"/>
+                <a:latin typeface="Calibri"/>
               </a:rPr>
               <a:t>The Pastoral Guide</a:t>
             </a:r>
@@ -4070,7 +4070,7 @@
                 <a:solidFill>
                   <a:srgbClr val="8B9179"/>
                 </a:solidFill>
-                <a:latin typeface="Karla"/>
+                <a:latin typeface="Calibri"/>
               </a:rPr>
               <a:t>1 / 27</a:t>
             </a:r>
@@ -4174,7 +4174,7 @@
                 <a:solidFill>
                   <a:srgbClr val="974F16"/>
                 </a:solidFill>
-                <a:latin typeface="Karla"/>
+                <a:latin typeface="Calibri"/>
               </a:rPr>
               <a:t>THE FORM TIME QUIZ  ·  ROUND TWO  ·  QUESTION 7 OF 10</a:t>
             </a:r>
@@ -4350,7 +4350,7 @@
                 <a:solidFill>
                   <a:srgbClr val="FFFDF7"/>
                 </a:solidFill>
-                <a:latin typeface="Karla"/>
+                <a:latin typeface="Calibri"/>
               </a:rPr>
               <a:t>7</a:t>
             </a:r>
@@ -4388,11 +4388,11 @@
               </a:spcAft>
             </a:pPr>
             <a:r>
-              <a:rPr sz="2400" b="1" i="0">
+              <a:rPr sz="2400" b="0" i="0">
                 <a:solidFill>
                   <a:srgbClr val="974F16"/>
                 </a:solidFill>
-                <a:latin typeface="Libre Caslon Display"/>
+                <a:latin typeface="Georgia"/>
               </a:rPr>
               <a:t>What is the largest ocean on Earth?</a:t>
             </a:r>
@@ -4478,7 +4478,7 @@
                 <a:solidFill>
                   <a:srgbClr val="8B9179"/>
                 </a:solidFill>
-                <a:latin typeface="Karla"/>
+                <a:latin typeface="Calibri"/>
               </a:rPr>
               <a:t>Agree it as a team, then write it on the sheet.</a:t>
             </a:r>
@@ -4544,7 +4544,7 @@
                 <a:solidFill>
                   <a:srgbClr val="8B9179"/>
                 </a:solidFill>
-                <a:latin typeface="Karla"/>
+                <a:latin typeface="Calibri"/>
               </a:rPr>
               <a:t>The Pastoral Guide</a:t>
             </a:r>
@@ -4586,7 +4586,7 @@
                 <a:solidFill>
                   <a:srgbClr val="8B9179"/>
                 </a:solidFill>
-                <a:latin typeface="Karla"/>
+                <a:latin typeface="Calibri"/>
               </a:rPr>
               <a:t>10 / 27</a:t>
             </a:r>
@@ -4690,7 +4690,7 @@
                 <a:solidFill>
                   <a:srgbClr val="974F16"/>
                 </a:solidFill>
-                <a:latin typeface="Karla"/>
+                <a:latin typeface="Calibri"/>
               </a:rPr>
               <a:t>THE FORM TIME QUIZ  ·  ROUND TWO  ·  QUESTION 8 OF 10</a:t>
             </a:r>
@@ -4866,7 +4866,7 @@
                 <a:solidFill>
                   <a:srgbClr val="FFFDF7"/>
                 </a:solidFill>
-                <a:latin typeface="Karla"/>
+                <a:latin typeface="Calibri"/>
               </a:rPr>
               <a:t>8</a:t>
             </a:r>
@@ -4904,11 +4904,11 @@
               </a:spcAft>
             </a:pPr>
             <a:r>
-              <a:rPr sz="2400" b="1" i="0">
+              <a:rPr sz="2400" b="0" i="0">
                 <a:solidFill>
                   <a:srgbClr val="974F16"/>
                 </a:solidFill>
-                <a:latin typeface="Libre Caslon Display"/>
+                <a:latin typeface="Georgia"/>
               </a:rPr>
               <a:t>How many sides does a hexagon have?</a:t>
             </a:r>
@@ -4950,7 +4950,7 @@
                 <a:solidFill>
                   <a:srgbClr val="8B9179"/>
                 </a:solidFill>
-                <a:latin typeface="Karla"/>
+                <a:latin typeface="Calibri"/>
               </a:rPr>
               <a:t>ONE OF THESE</a:t>
             </a:r>
@@ -5126,7 +5126,7 @@
                 <a:solidFill>
                   <a:srgbClr val="FFFDF7"/>
                 </a:solidFill>
-                <a:latin typeface="Karla"/>
+                <a:latin typeface="Calibri"/>
               </a:rPr>
               <a:t>A</a:t>
             </a:r>
@@ -5168,7 +5168,7 @@
                 <a:solidFill>
                   <a:srgbClr val="2E3436"/>
                 </a:solidFill>
-                <a:latin typeface="Karla"/>
+                <a:latin typeface="Calibri"/>
               </a:rPr>
               <a:t>Five</a:t>
             </a:r>
@@ -5344,7 +5344,7 @@
                 <a:solidFill>
                   <a:srgbClr val="FFFDF7"/>
                 </a:solidFill>
-                <a:latin typeface="Karla"/>
+                <a:latin typeface="Calibri"/>
               </a:rPr>
               <a:t>B</a:t>
             </a:r>
@@ -5386,7 +5386,7 @@
                 <a:solidFill>
                   <a:srgbClr val="2E3436"/>
                 </a:solidFill>
-                <a:latin typeface="Karla"/>
+                <a:latin typeface="Calibri"/>
               </a:rPr>
               <a:t>Six</a:t>
             </a:r>
@@ -5562,7 +5562,7 @@
                 <a:solidFill>
                   <a:srgbClr val="FFFDF7"/>
                 </a:solidFill>
-                <a:latin typeface="Karla"/>
+                <a:latin typeface="Calibri"/>
               </a:rPr>
               <a:t>C</a:t>
             </a:r>
@@ -5604,7 +5604,7 @@
                 <a:solidFill>
                   <a:srgbClr val="2E3436"/>
                 </a:solidFill>
-                <a:latin typeface="Karla"/>
+                <a:latin typeface="Calibri"/>
               </a:rPr>
               <a:t>Eight</a:t>
             </a:r>
@@ -5646,7 +5646,7 @@
                 <a:solidFill>
                   <a:srgbClr val="5C6552"/>
                 </a:solidFill>
-                <a:latin typeface="Karla"/>
+                <a:latin typeface="Calibri"/>
               </a:rPr>
               <a:t>Agree it as a team, then tick it on the sheet.</a:t>
             </a:r>
@@ -5712,7 +5712,7 @@
                 <a:solidFill>
                   <a:srgbClr val="8B9179"/>
                 </a:solidFill>
-                <a:latin typeface="Karla"/>
+                <a:latin typeface="Calibri"/>
               </a:rPr>
               <a:t>The Pastoral Guide</a:t>
             </a:r>
@@ -5754,7 +5754,7 @@
                 <a:solidFill>
                   <a:srgbClr val="8B9179"/>
                 </a:solidFill>
-                <a:latin typeface="Karla"/>
+                <a:latin typeface="Calibri"/>
               </a:rPr>
               <a:t>11 / 27</a:t>
             </a:r>
@@ -5858,7 +5858,7 @@
                 <a:solidFill>
                   <a:srgbClr val="974F16"/>
                 </a:solidFill>
-                <a:latin typeface="Karla"/>
+                <a:latin typeface="Calibri"/>
               </a:rPr>
               <a:t>THE FORM TIME QUIZ  ·  ROUND TWO  ·  QUESTION 9 OF 10</a:t>
             </a:r>
@@ -6034,7 +6034,7 @@
                 <a:solidFill>
                   <a:srgbClr val="FFFDF7"/>
                 </a:solidFill>
-                <a:latin typeface="Karla"/>
+                <a:latin typeface="Calibri"/>
               </a:rPr>
               <a:t>9</a:t>
             </a:r>
@@ -6072,11 +6072,11 @@
               </a:spcAft>
             </a:pPr>
             <a:r>
-              <a:rPr sz="2400" b="1" i="0">
+              <a:rPr sz="2400" b="0" i="0">
                 <a:solidFill>
                   <a:srgbClr val="974F16"/>
                 </a:solidFill>
-                <a:latin typeface="Libre Caslon Display"/>
+                <a:latin typeface="Georgia"/>
               </a:rPr>
               <a:t>Which country’s flag is a red circle on a white background?</a:t>
             </a:r>
@@ -6162,7 +6162,7 @@
                 <a:solidFill>
                   <a:srgbClr val="8B9179"/>
                 </a:solidFill>
-                <a:latin typeface="Karla"/>
+                <a:latin typeface="Calibri"/>
               </a:rPr>
               <a:t>Agree it as a team, then write it on the sheet.</a:t>
             </a:r>
@@ -6228,7 +6228,7 @@
                 <a:solidFill>
                   <a:srgbClr val="8B9179"/>
                 </a:solidFill>
-                <a:latin typeface="Karla"/>
+                <a:latin typeface="Calibri"/>
               </a:rPr>
               <a:t>The Pastoral Guide</a:t>
             </a:r>
@@ -6270,7 +6270,7 @@
                 <a:solidFill>
                   <a:srgbClr val="8B9179"/>
                 </a:solidFill>
-                <a:latin typeface="Karla"/>
+                <a:latin typeface="Calibri"/>
               </a:rPr>
               <a:t>12 / 27</a:t>
             </a:r>
@@ -6374,7 +6374,7 @@
                 <a:solidFill>
                   <a:srgbClr val="974F16"/>
                 </a:solidFill>
-                <a:latin typeface="Karla"/>
+                <a:latin typeface="Calibri"/>
               </a:rPr>
               <a:t>THE FORM TIME QUIZ  ·  ROUND TWO  ·  QUESTION 10 OF 10</a:t>
             </a:r>
@@ -6550,7 +6550,7 @@
                 <a:solidFill>
                   <a:srgbClr val="FFFDF7"/>
                 </a:solidFill>
-                <a:latin typeface="Karla"/>
+                <a:latin typeface="Calibri"/>
               </a:rPr>
               <a:t>10</a:t>
             </a:r>
@@ -6588,11 +6588,11 @@
               </a:spcAft>
             </a:pPr>
             <a:r>
-              <a:rPr sz="2400" b="1" i="0">
+              <a:rPr sz="2400" b="0" i="0">
                 <a:solidFill>
                   <a:srgbClr val="974F16"/>
                 </a:solidFill>
-                <a:latin typeface="Libre Caslon Display"/>
+                <a:latin typeface="Georgia"/>
               </a:rPr>
               <a:t>Which planet is known as the Red Planet?</a:t>
             </a:r>
@@ -6678,7 +6678,7 @@
                 <a:solidFill>
                   <a:srgbClr val="8B9179"/>
                 </a:solidFill>
-                <a:latin typeface="Karla"/>
+                <a:latin typeface="Calibri"/>
               </a:rPr>
               <a:t>Agree it as a team, then write it on the sheet.</a:t>
             </a:r>
@@ -6744,7 +6744,7 @@
                 <a:solidFill>
                   <a:srgbClr val="8B9179"/>
                 </a:solidFill>
-                <a:latin typeface="Karla"/>
+                <a:latin typeface="Calibri"/>
               </a:rPr>
               <a:t>The Pastoral Guide</a:t>
             </a:r>
@@ -6786,7 +6786,7 @@
                 <a:solidFill>
                   <a:srgbClr val="8B9179"/>
                 </a:solidFill>
-                <a:latin typeface="Karla"/>
+                <a:latin typeface="Calibri"/>
               </a:rPr>
               <a:t>13 / 27</a:t>
             </a:r>
@@ -6903,7 +6903,7 @@
                 <a:solidFill>
                   <a:srgbClr val="974F16"/>
                 </a:solidFill>
-                <a:latin typeface="Karla"/>
+                <a:latin typeface="Calibri"/>
               </a:rPr>
               <a:t>ANSWERS</a:t>
             </a:r>
@@ -6941,11 +6941,11 @@
               </a:spcAft>
             </a:pPr>
             <a:r>
-              <a:rPr sz="4000" b="1" i="0">
+              <a:rPr sz="4000" b="0" i="0">
                 <a:solidFill>
                   <a:srgbClr val="FFFDF7"/>
                 </a:solidFill>
-                <a:latin typeface="Libre Caslon Display"/>
+                <a:latin typeface="Georgia"/>
               </a:rPr>
               <a:t>Swap sheets</a:t>
             </a:r>
@@ -7031,7 +7031,7 @@
                 <a:solidFill>
                   <a:srgbClr val="EBCDAE"/>
                 </a:solidFill>
-                <a:latin typeface="Karla"/>
+                <a:latin typeface="Calibri"/>
               </a:rPr>
               <a:t>Swap with the team next to you. Give one mark for each right answer, then add up the score out of ten.</a:t>
             </a:r>
@@ -7097,7 +7097,7 @@
                 <a:solidFill>
                   <a:srgbClr val="EBCDAE"/>
                 </a:solidFill>
-                <a:latin typeface="Karla"/>
+                <a:latin typeface="Calibri"/>
               </a:rPr>
               <a:t>The Pastoral Guide</a:t>
             </a:r>
@@ -7139,7 +7139,7 @@
                 <a:solidFill>
                   <a:srgbClr val="EBCDAE"/>
                 </a:solidFill>
-                <a:latin typeface="Karla"/>
+                <a:latin typeface="Calibri"/>
               </a:rPr>
               <a:t>14 / 27</a:t>
             </a:r>
@@ -7243,7 +7243,7 @@
                 <a:solidFill>
                   <a:srgbClr val="974F16"/>
                 </a:solidFill>
-                <a:latin typeface="Karla"/>
+                <a:latin typeface="Calibri"/>
               </a:rPr>
               <a:t>THE FORM TIME QUIZ  ·  ANSWERS  ·  QUESTION 1</a:t>
             </a:r>
@@ -7285,7 +7285,7 @@
                 <a:solidFill>
                   <a:srgbClr val="5C6552"/>
                 </a:solidFill>
-                <a:latin typeface="Karla"/>
+                <a:latin typeface="Calibri"/>
               </a:rPr>
               <a:t>How much sleep do most teenagers need a night?</a:t>
             </a:r>
@@ -7323,11 +7323,11 @@
               </a:spcAft>
             </a:pPr>
             <a:r>
-              <a:rPr sz="3400" b="1" i="0">
+              <a:rPr sz="3400" b="0" i="0">
                 <a:solidFill>
                   <a:srgbClr val="974F16"/>
                 </a:solidFill>
-                <a:latin typeface="Libre Caslon Display"/>
+                <a:latin typeface="Georgia"/>
               </a:rPr>
               <a:t>B.  8 to 10 hours</a:t>
             </a:r>
@@ -7459,7 +7459,7 @@
                 <a:solidFill>
                   <a:srgbClr val="2E3436"/>
                 </a:solidFill>
-                <a:latin typeface="Karla"/>
+                <a:latin typeface="Calibri"/>
               </a:rPr>
               <a:t>Most health services put it at eight to ten hours. Most teenagers get less than that on a school night.</a:t>
             </a:r>
@@ -7525,7 +7525,7 @@
                 <a:solidFill>
                   <a:srgbClr val="8B9179"/>
                 </a:solidFill>
-                <a:latin typeface="Karla"/>
+                <a:latin typeface="Calibri"/>
               </a:rPr>
               <a:t>The Pastoral Guide</a:t>
             </a:r>
@@ -7567,7 +7567,7 @@
                 <a:solidFill>
                   <a:srgbClr val="8B9179"/>
                 </a:solidFill>
-                <a:latin typeface="Karla"/>
+                <a:latin typeface="Calibri"/>
               </a:rPr>
               <a:t>15 / 27</a:t>
             </a:r>
@@ -7671,7 +7671,7 @@
                 <a:solidFill>
                   <a:srgbClr val="974F16"/>
                 </a:solidFill>
-                <a:latin typeface="Karla"/>
+                <a:latin typeface="Calibri"/>
               </a:rPr>
               <a:t>THE FORM TIME QUIZ  ·  ANSWERS  ·  QUESTION 2</a:t>
             </a:r>
@@ -7713,7 +7713,7 @@
                 <a:solidFill>
                   <a:srgbClr val="5C6552"/>
                 </a:solidFill>
-                <a:latin typeface="Karla"/>
+                <a:latin typeface="Calibri"/>
               </a:rPr>
               <a:t>Your body clock shifts later when you are a teenager, so feeling wide awake late at night is normal.</a:t>
             </a:r>
@@ -7751,11 +7751,11 @@
               </a:spcAft>
             </a:pPr>
             <a:r>
-              <a:rPr sz="3400" b="1" i="0">
+              <a:rPr sz="3400" b="0" i="0">
                 <a:solidFill>
                   <a:srgbClr val="974F16"/>
                 </a:solidFill>
-                <a:latin typeface="Libre Caslon Display"/>
+                <a:latin typeface="Georgia"/>
               </a:rPr>
               <a:t>Fact</a:t>
             </a:r>
@@ -7887,7 +7887,7 @@
                 <a:solidFill>
                   <a:srgbClr val="2E3436"/>
                 </a:solidFill>
-                <a:latin typeface="Karla"/>
+                <a:latin typeface="Calibri"/>
               </a:rPr>
               <a:t>The hormone that makes you sleepy arrives later in the evening during the teenage years. It is biology, not laziness.</a:t>
             </a:r>
@@ -7953,7 +7953,7 @@
                 <a:solidFill>
                   <a:srgbClr val="8B9179"/>
                 </a:solidFill>
-                <a:latin typeface="Karla"/>
+                <a:latin typeface="Calibri"/>
               </a:rPr>
               <a:t>The Pastoral Guide</a:t>
             </a:r>
@@ -7995,7 +7995,7 @@
                 <a:solidFill>
                   <a:srgbClr val="8B9179"/>
                 </a:solidFill>
-                <a:latin typeface="Karla"/>
+                <a:latin typeface="Calibri"/>
               </a:rPr>
               <a:t>16 / 27</a:t>
             </a:r>
@@ -8099,7 +8099,7 @@
                 <a:solidFill>
                   <a:srgbClr val="974F16"/>
                 </a:solidFill>
-                <a:latin typeface="Karla"/>
+                <a:latin typeface="Calibri"/>
               </a:rPr>
               <a:t>THE FORM TIME QUIZ  ·  ANSWERS  ·  QUESTION 3</a:t>
             </a:r>
@@ -8141,7 +8141,7 @@
                 <a:solidFill>
                   <a:srgbClr val="5C6552"/>
                 </a:solidFill>
-                <a:latin typeface="Karla"/>
+                <a:latin typeface="Calibri"/>
               </a:rPr>
               <a:t>Cracking your knuckles gives you arthritis.</a:t>
             </a:r>
@@ -8179,11 +8179,11 @@
               </a:spcAft>
             </a:pPr>
             <a:r>
-              <a:rPr sz="3400" b="1" i="0">
+              <a:rPr sz="3400" b="0" i="0">
                 <a:solidFill>
                   <a:srgbClr val="974F16"/>
                 </a:solidFill>
-                <a:latin typeface="Libre Caslon Display"/>
+                <a:latin typeface="Georgia"/>
               </a:rPr>
               <a:t>Myth</a:t>
             </a:r>
@@ -8315,7 +8315,7 @@
                 <a:solidFill>
                   <a:srgbClr val="2E3436"/>
                 </a:solidFill>
-                <a:latin typeface="Karla"/>
+                <a:latin typeface="Calibri"/>
               </a:rPr>
               <a:t>Studies comparing people who crack their knuckles with people who never do have found no link. The pop is a bubble of gas in the fluid around the joint.</a:t>
             </a:r>
@@ -8381,7 +8381,7 @@
                 <a:solidFill>
                   <a:srgbClr val="8B9179"/>
                 </a:solidFill>
-                <a:latin typeface="Karla"/>
+                <a:latin typeface="Calibri"/>
               </a:rPr>
               <a:t>The Pastoral Guide</a:t>
             </a:r>
@@ -8423,7 +8423,7 @@
                 <a:solidFill>
                   <a:srgbClr val="8B9179"/>
                 </a:solidFill>
-                <a:latin typeface="Karla"/>
+                <a:latin typeface="Calibri"/>
               </a:rPr>
               <a:t>17 / 27</a:t>
             </a:r>
@@ -8527,7 +8527,7 @@
                 <a:solidFill>
                   <a:srgbClr val="974F16"/>
                 </a:solidFill>
-                <a:latin typeface="Karla"/>
+                <a:latin typeface="Calibri"/>
               </a:rPr>
               <a:t>THE FORM TIME QUIZ  ·  ANSWERS  ·  QUESTION 4</a:t>
             </a:r>
@@ -8569,7 +8569,7 @@
                 <a:solidFill>
                   <a:srgbClr val="5C6552"/>
                 </a:solidFill>
-                <a:latin typeface="Karla"/>
+                <a:latin typeface="Calibri"/>
               </a:rPr>
               <a:t>How long should you brush your teeth for?</a:t>
             </a:r>
@@ -8607,11 +8607,11 @@
               </a:spcAft>
             </a:pPr>
             <a:r>
-              <a:rPr sz="3400" b="1" i="0">
+              <a:rPr sz="3400" b="0" i="0">
                 <a:solidFill>
                   <a:srgbClr val="974F16"/>
                 </a:solidFill>
-                <a:latin typeface="Libre Caslon Display"/>
+                <a:latin typeface="Georgia"/>
               </a:rPr>
               <a:t>B.  Two minutes</a:t>
             </a:r>
@@ -8743,7 +8743,7 @@
                 <a:solidFill>
                   <a:srgbClr val="2E3436"/>
                 </a:solidFill>
-                <a:latin typeface="Karla"/>
+                <a:latin typeface="Calibri"/>
               </a:rPr>
               <a:t>Dentists recommend about two minutes, twice a day. Most people stop well before that.</a:t>
             </a:r>
@@ -8809,7 +8809,7 @@
                 <a:solidFill>
                   <a:srgbClr val="8B9179"/>
                 </a:solidFill>
-                <a:latin typeface="Karla"/>
+                <a:latin typeface="Calibri"/>
               </a:rPr>
               <a:t>The Pastoral Guide</a:t>
             </a:r>
@@ -8851,7 +8851,7 @@
                 <a:solidFill>
                   <a:srgbClr val="8B9179"/>
                 </a:solidFill>
-                <a:latin typeface="Karla"/>
+                <a:latin typeface="Calibri"/>
               </a:rPr>
               <a:t>18 / 27</a:t>
             </a:r>
@@ -8955,7 +8955,7 @@
                 <a:solidFill>
                   <a:srgbClr val="974F16"/>
                 </a:solidFill>
-                <a:latin typeface="Karla"/>
+                <a:latin typeface="Calibri"/>
               </a:rPr>
               <a:t>THE FORM TIME QUIZ  ·  ANSWERS  ·  QUESTION 5</a:t>
             </a:r>
@@ -8997,7 +8997,7 @@
                 <a:solidFill>
                   <a:srgbClr val="5C6552"/>
                 </a:solidFill>
-                <a:latin typeface="Karla"/>
+                <a:latin typeface="Calibri"/>
               </a:rPr>
               <a:t>Eating carrots lets you see in the dark.</a:t>
             </a:r>
@@ -9035,11 +9035,11 @@
               </a:spcAft>
             </a:pPr>
             <a:r>
-              <a:rPr sz="3400" b="1" i="0">
+              <a:rPr sz="3400" b="0" i="0">
                 <a:solidFill>
                   <a:srgbClr val="974F16"/>
                 </a:solidFill>
-                <a:latin typeface="Libre Caslon Display"/>
+                <a:latin typeface="Georgia"/>
               </a:rPr>
               <a:t>Myth</a:t>
             </a:r>
@@ -9171,7 +9171,7 @@
                 <a:solidFill>
                   <a:srgbClr val="2E3436"/>
                 </a:solidFill>
-                <a:latin typeface="Karla"/>
+                <a:latin typeface="Calibri"/>
               </a:rPr>
               <a:t>The story was spread in the Second World War to hide the fact that British pilots were using radar. Carrots are good for your eyes, but they will not give you night vision.</a:t>
             </a:r>
@@ -9237,7 +9237,7 @@
                 <a:solidFill>
                   <a:srgbClr val="8B9179"/>
                 </a:solidFill>
-                <a:latin typeface="Karla"/>
+                <a:latin typeface="Calibri"/>
               </a:rPr>
               <a:t>The Pastoral Guide</a:t>
             </a:r>
@@ -9279,7 +9279,7 @@
                 <a:solidFill>
                   <a:srgbClr val="8B9179"/>
                 </a:solidFill>
-                <a:latin typeface="Karla"/>
+                <a:latin typeface="Calibri"/>
               </a:rPr>
               <a:t>19 / 27</a:t>
             </a:r>
@@ -9396,7 +9396,7 @@
                 <a:solidFill>
                   <a:srgbClr val="974F16"/>
                 </a:solidFill>
-                <a:latin typeface="Karla"/>
+                <a:latin typeface="Calibri"/>
               </a:rPr>
               <a:t>ROUND ONE</a:t>
             </a:r>
@@ -9434,11 +9434,11 @@
               </a:spcAft>
             </a:pPr>
             <a:r>
-              <a:rPr sz="4000" b="1" i="0">
+              <a:rPr sz="4000" b="0" i="0">
                 <a:solidFill>
                   <a:srgbClr val="FFFDF7"/>
                 </a:solidFill>
-                <a:latin typeface="Libre Caslon Display"/>
+                <a:latin typeface="Georgia"/>
               </a:rPr>
               <a:t>Healthy habits</a:t>
             </a:r>
@@ -9524,7 +9524,7 @@
                 <a:solidFill>
                   <a:srgbClr val="EBCDAE"/>
                 </a:solidFill>
-                <a:latin typeface="Karla"/>
+                <a:latin typeface="Calibri"/>
               </a:rPr>
               <a:t>Six questions. Some are fact or myth, and some give you three options to choose from.</a:t>
             </a:r>
@@ -9590,7 +9590,7 @@
                 <a:solidFill>
                   <a:srgbClr val="EBCDAE"/>
                 </a:solidFill>
-                <a:latin typeface="Karla"/>
+                <a:latin typeface="Calibri"/>
               </a:rPr>
               <a:t>The Pastoral Guide</a:t>
             </a:r>
@@ -9632,7 +9632,7 @@
                 <a:solidFill>
                   <a:srgbClr val="EBCDAE"/>
                 </a:solidFill>
-                <a:latin typeface="Karla"/>
+                <a:latin typeface="Calibri"/>
               </a:rPr>
               <a:t>2 / 27</a:t>
             </a:r>
@@ -9736,7 +9736,7 @@
                 <a:solidFill>
                   <a:srgbClr val="974F16"/>
                 </a:solidFill>
-                <a:latin typeface="Karla"/>
+                <a:latin typeface="Calibri"/>
               </a:rPr>
               <a:t>THE FORM TIME QUIZ  ·  ANSWERS  ·  QUESTION 6</a:t>
             </a:r>
@@ -9778,7 +9778,7 @@
                 <a:solidFill>
                   <a:srgbClr val="5C6552"/>
                 </a:solidFill>
-                <a:latin typeface="Karla"/>
+                <a:latin typeface="Calibri"/>
               </a:rPr>
               <a:t>Your brain keeps working on what you learned that day while you sleep.</a:t>
             </a:r>
@@ -9816,11 +9816,11 @@
               </a:spcAft>
             </a:pPr>
             <a:r>
-              <a:rPr sz="3400" b="1" i="0">
+              <a:rPr sz="3400" b="0" i="0">
                 <a:solidFill>
                   <a:srgbClr val="974F16"/>
                 </a:solidFill>
-                <a:latin typeface="Libre Caslon Display"/>
+                <a:latin typeface="Georgia"/>
               </a:rPr>
               <a:t>Fact</a:t>
             </a:r>
@@ -9952,7 +9952,7 @@
                 <a:solidFill>
                   <a:srgbClr val="2E3436"/>
                 </a:solidFill>
-                <a:latin typeface="Karla"/>
+                <a:latin typeface="Calibri"/>
               </a:rPr>
               <a:t>Sleep is when the brain sorts and stores the day’s memories, which is why a good night’s sleep matters so much before a test.</a:t>
             </a:r>
@@ -10018,7 +10018,7 @@
                 <a:solidFill>
                   <a:srgbClr val="8B9179"/>
                 </a:solidFill>
-                <a:latin typeface="Karla"/>
+                <a:latin typeface="Calibri"/>
               </a:rPr>
               <a:t>The Pastoral Guide</a:t>
             </a:r>
@@ -10060,7 +10060,7 @@
                 <a:solidFill>
                   <a:srgbClr val="8B9179"/>
                 </a:solidFill>
-                <a:latin typeface="Karla"/>
+                <a:latin typeface="Calibri"/>
               </a:rPr>
               <a:t>20 / 27</a:t>
             </a:r>
@@ -10164,7 +10164,7 @@
                 <a:solidFill>
                   <a:srgbClr val="974F16"/>
                 </a:solidFill>
-                <a:latin typeface="Karla"/>
+                <a:latin typeface="Calibri"/>
               </a:rPr>
               <a:t>THE FORM TIME QUIZ  ·  ANSWERS  ·  QUESTION 7</a:t>
             </a:r>
@@ -10206,7 +10206,7 @@
                 <a:solidFill>
                   <a:srgbClr val="5C6552"/>
                 </a:solidFill>
-                <a:latin typeface="Karla"/>
+                <a:latin typeface="Calibri"/>
               </a:rPr>
               <a:t>What is the largest ocean on Earth?</a:t>
             </a:r>
@@ -10244,11 +10244,11 @@
               </a:spcAft>
             </a:pPr>
             <a:r>
-              <a:rPr sz="3400" b="1" i="0">
+              <a:rPr sz="3400" b="0" i="0">
                 <a:solidFill>
                   <a:srgbClr val="974F16"/>
                 </a:solidFill>
-                <a:latin typeface="Libre Caslon Display"/>
+                <a:latin typeface="Georgia"/>
               </a:rPr>
               <a:t>The Pacific</a:t>
             </a:r>
@@ -10380,7 +10380,7 @@
                 <a:solidFill>
                   <a:srgbClr val="2E3436"/>
                 </a:solidFill>
-                <a:latin typeface="Karla"/>
+                <a:latin typeface="Calibri"/>
               </a:rPr>
               <a:t>It covers about a third of the planet, more than all the land put together.</a:t>
             </a:r>
@@ -10446,7 +10446,7 @@
                 <a:solidFill>
                   <a:srgbClr val="8B9179"/>
                 </a:solidFill>
-                <a:latin typeface="Karla"/>
+                <a:latin typeface="Calibri"/>
               </a:rPr>
               <a:t>The Pastoral Guide</a:t>
             </a:r>
@@ -10488,7 +10488,7 @@
                 <a:solidFill>
                   <a:srgbClr val="8B9179"/>
                 </a:solidFill>
-                <a:latin typeface="Karla"/>
+                <a:latin typeface="Calibri"/>
               </a:rPr>
               <a:t>21 / 27</a:t>
             </a:r>
@@ -10592,7 +10592,7 @@
                 <a:solidFill>
                   <a:srgbClr val="974F16"/>
                 </a:solidFill>
-                <a:latin typeface="Karla"/>
+                <a:latin typeface="Calibri"/>
               </a:rPr>
               <a:t>THE FORM TIME QUIZ  ·  ANSWERS  ·  QUESTION 8</a:t>
             </a:r>
@@ -10634,7 +10634,7 @@
                 <a:solidFill>
                   <a:srgbClr val="5C6552"/>
                 </a:solidFill>
-                <a:latin typeface="Karla"/>
+                <a:latin typeface="Calibri"/>
               </a:rPr>
               <a:t>How many sides does a hexagon have?</a:t>
             </a:r>
@@ -10672,11 +10672,11 @@
               </a:spcAft>
             </a:pPr>
             <a:r>
-              <a:rPr sz="3400" b="1" i="0">
+              <a:rPr sz="3400" b="0" i="0">
                 <a:solidFill>
                   <a:srgbClr val="974F16"/>
                 </a:solidFill>
-                <a:latin typeface="Libre Caslon Display"/>
+                <a:latin typeface="Georgia"/>
               </a:rPr>
               <a:t>B.  Six</a:t>
             </a:r>
@@ -10808,7 +10808,7 @@
                 <a:solidFill>
                   <a:srgbClr val="2E3436"/>
                 </a:solidFill>
-                <a:latin typeface="Karla"/>
+                <a:latin typeface="Calibri"/>
               </a:rPr>
               <a:t>Hex means six. Bees build their honeycomb out of hexagons.</a:t>
             </a:r>
@@ -10874,7 +10874,7 @@
                 <a:solidFill>
                   <a:srgbClr val="8B9179"/>
                 </a:solidFill>
-                <a:latin typeface="Karla"/>
+                <a:latin typeface="Calibri"/>
               </a:rPr>
               <a:t>The Pastoral Guide</a:t>
             </a:r>
@@ -10916,7 +10916,7 @@
                 <a:solidFill>
                   <a:srgbClr val="8B9179"/>
                 </a:solidFill>
-                <a:latin typeface="Karla"/>
+                <a:latin typeface="Calibri"/>
               </a:rPr>
               <a:t>22 / 27</a:t>
             </a:r>
@@ -11020,7 +11020,7 @@
                 <a:solidFill>
                   <a:srgbClr val="974F16"/>
                 </a:solidFill>
-                <a:latin typeface="Karla"/>
+                <a:latin typeface="Calibri"/>
               </a:rPr>
               <a:t>THE FORM TIME QUIZ  ·  ANSWERS  ·  QUESTION 9</a:t>
             </a:r>
@@ -11062,7 +11062,7 @@
                 <a:solidFill>
                   <a:srgbClr val="5C6552"/>
                 </a:solidFill>
-                <a:latin typeface="Karla"/>
+                <a:latin typeface="Calibri"/>
               </a:rPr>
               <a:t>Which country’s flag is a red circle on a white background?</a:t>
             </a:r>
@@ -11100,11 +11100,11 @@
               </a:spcAft>
             </a:pPr>
             <a:r>
-              <a:rPr sz="3400" b="1" i="0">
+              <a:rPr sz="3400" b="0" i="0">
                 <a:solidFill>
                   <a:srgbClr val="974F16"/>
                 </a:solidFill>
-                <a:latin typeface="Libre Caslon Display"/>
+                <a:latin typeface="Georgia"/>
               </a:rPr>
               <a:t>Japan</a:t>
             </a:r>
@@ -11236,7 +11236,7 @@
                 <a:solidFill>
                   <a:srgbClr val="2E3436"/>
                 </a:solidFill>
-                <a:latin typeface="Karla"/>
+                <a:latin typeface="Calibri"/>
               </a:rPr>
               <a:t>The red circle stands for the sun. Japan’s name in Japanese means where the sun comes from.</a:t>
             </a:r>
@@ -11302,7 +11302,7 @@
                 <a:solidFill>
                   <a:srgbClr val="8B9179"/>
                 </a:solidFill>
-                <a:latin typeface="Karla"/>
+                <a:latin typeface="Calibri"/>
               </a:rPr>
               <a:t>The Pastoral Guide</a:t>
             </a:r>
@@ -11344,7 +11344,7 @@
                 <a:solidFill>
                   <a:srgbClr val="8B9179"/>
                 </a:solidFill>
-                <a:latin typeface="Karla"/>
+                <a:latin typeface="Calibri"/>
               </a:rPr>
               <a:t>23 / 27</a:t>
             </a:r>
@@ -11448,7 +11448,7 @@
                 <a:solidFill>
                   <a:srgbClr val="974F16"/>
                 </a:solidFill>
-                <a:latin typeface="Karla"/>
+                <a:latin typeface="Calibri"/>
               </a:rPr>
               <a:t>THE FORM TIME QUIZ  ·  ANSWERS  ·  QUESTION 10</a:t>
             </a:r>
@@ -11490,7 +11490,7 @@
                 <a:solidFill>
                   <a:srgbClr val="5C6552"/>
                 </a:solidFill>
-                <a:latin typeface="Karla"/>
+                <a:latin typeface="Calibri"/>
               </a:rPr>
               <a:t>Which planet is known as the Red Planet?</a:t>
             </a:r>
@@ -11528,11 +11528,11 @@
               </a:spcAft>
             </a:pPr>
             <a:r>
-              <a:rPr sz="3400" b="1" i="0">
+              <a:rPr sz="3400" b="0" i="0">
                 <a:solidFill>
                   <a:srgbClr val="974F16"/>
                 </a:solidFill>
-                <a:latin typeface="Libre Caslon Display"/>
+                <a:latin typeface="Georgia"/>
               </a:rPr>
               <a:t>Mars</a:t>
             </a:r>
@@ -11664,7 +11664,7 @@
                 <a:solidFill>
                   <a:srgbClr val="2E3436"/>
                 </a:solidFill>
-                <a:latin typeface="Karla"/>
+                <a:latin typeface="Calibri"/>
               </a:rPr>
               <a:t>The red comes from iron in its soil, which has rusted.</a:t>
             </a:r>
@@ -11730,7 +11730,7 @@
                 <a:solidFill>
                   <a:srgbClr val="8B9179"/>
                 </a:solidFill>
-                <a:latin typeface="Karla"/>
+                <a:latin typeface="Calibri"/>
               </a:rPr>
               <a:t>The Pastoral Guide</a:t>
             </a:r>
@@ -11772,7 +11772,7 @@
                 <a:solidFill>
                   <a:srgbClr val="8B9179"/>
                 </a:solidFill>
-                <a:latin typeface="Karla"/>
+                <a:latin typeface="Calibri"/>
               </a:rPr>
               <a:t>24 / 27</a:t>
             </a:r>
@@ -11876,7 +11876,7 @@
                 <a:solidFill>
                   <a:srgbClr val="974F16"/>
                 </a:solidFill>
-                <a:latin typeface="Karla"/>
+                <a:latin typeface="Calibri"/>
               </a:rPr>
               <a:t>THE FORM TIME QUIZ  ·  VOLUME ONE</a:t>
             </a:r>
@@ -11938,11 +11938,11 @@
               </a:spcAft>
             </a:pPr>
             <a:r>
-              <a:rPr sz="3200" b="1" i="0">
+              <a:rPr sz="3200" b="0" i="0">
                 <a:solidFill>
                   <a:srgbClr val="974F16"/>
                 </a:solidFill>
-                <a:latin typeface="Libre Caslon Display"/>
+                <a:latin typeface="Georgia"/>
               </a:rPr>
               <a:t>Scores back to their owners</a:t>
             </a:r>
@@ -11984,7 +11984,7 @@
                 <a:solidFill>
                   <a:srgbClr val="5C6552"/>
                 </a:solidFill>
-                <a:latin typeface="Karla"/>
+                <a:latin typeface="Calibri"/>
               </a:rPr>
               <a:t>Hands up if you got ten. Then hands up if one of the answers surprised you, and tell us which.</a:t>
             </a:r>
@@ -12026,7 +12026,7 @@
                 <a:solidFill>
                   <a:srgbClr val="8B9179"/>
                 </a:solidFill>
-                <a:latin typeface="Karla"/>
+                <a:latin typeface="Calibri"/>
               </a:rPr>
               <a:t>Volume Two is available now at thepastoralguide.com.</a:t>
             </a:r>
@@ -12092,7 +12092,7 @@
                 <a:solidFill>
                   <a:srgbClr val="8B9179"/>
                 </a:solidFill>
-                <a:latin typeface="Karla"/>
+                <a:latin typeface="Calibri"/>
               </a:rPr>
               <a:t>The Pastoral Guide</a:t>
             </a:r>
@@ -12134,7 +12134,7 @@
                 <a:solidFill>
                   <a:srgbClr val="8B9179"/>
                 </a:solidFill>
-                <a:latin typeface="Karla"/>
+                <a:latin typeface="Calibri"/>
               </a:rPr>
               <a:t>25 / 27</a:t>
             </a:r>
@@ -12251,7 +12251,7 @@
                 <a:solidFill>
                   <a:srgbClr val="974F16"/>
                 </a:solidFill>
-                <a:latin typeface="Karla"/>
+                <a:latin typeface="Calibri"/>
               </a:rPr>
               <a:t>FOR THE TEACHER  ·  ADD YOUR OWN</a:t>
             </a:r>
@@ -12427,7 +12427,7 @@
                 <a:solidFill>
                   <a:srgbClr val="FFFDF7"/>
                 </a:solidFill>
-                <a:latin typeface="Karla"/>
+                <a:latin typeface="Calibri"/>
               </a:rPr>
               <a:t>?</a:t>
             </a:r>
@@ -12465,11 +12465,11 @@
               </a:spcAft>
             </a:pPr>
             <a:r>
-              <a:rPr sz="2400" b="1" i="0">
+              <a:rPr sz="2400" b="0" i="0">
                 <a:solidFill>
                   <a:srgbClr val="974F16"/>
                 </a:solidFill>
-                <a:latin typeface="Libre Caslon Display"/>
+                <a:latin typeface="Georgia"/>
               </a:rPr>
               <a:t>[ Type your own question here ]</a:t>
             </a:r>
@@ -12511,7 +12511,7 @@
                 <a:solidFill>
                   <a:srgbClr val="5C6552"/>
                 </a:solidFill>
-                <a:latin typeface="Karla"/>
+                <a:latin typeface="Calibri"/>
               </a:rPr>
               <a:t>Add your own questions here: something from assembly, a date coming up, or a question about your own school.</a:t>
             </a:r>
@@ -12533,7 +12533,7 @@
                 <a:solidFill>
                   <a:srgbClr val="5C6552"/>
                 </a:solidFill>
-                <a:latin typeface="Karla"/>
+                <a:latin typeface="Calibri"/>
               </a:rPr>
               <a:t>Duplicate this slide for each one and drag it in after question 10. There are two spare rows on the answer sheet for them.</a:t>
             </a:r>
@@ -12599,7 +12599,7 @@
                 <a:solidFill>
                   <a:srgbClr val="8B9179"/>
                 </a:solidFill>
-                <a:latin typeface="Karla"/>
+                <a:latin typeface="Calibri"/>
               </a:rPr>
               <a:t>The Pastoral Guide</a:t>
             </a:r>
@@ -12641,7 +12641,7 @@
                 <a:solidFill>
                   <a:srgbClr val="8B9179"/>
                 </a:solidFill>
-                <a:latin typeface="Karla"/>
+                <a:latin typeface="Calibri"/>
               </a:rPr>
               <a:t>26 / 27</a:t>
             </a:r>
@@ -12758,7 +12758,7 @@
                 <a:solidFill>
                   <a:srgbClr val="974F16"/>
                 </a:solidFill>
-                <a:latin typeface="Karla"/>
+                <a:latin typeface="Calibri"/>
               </a:rPr>
               <a:t>FOR THE TEACHER  ·  ADD YOUR OWN</a:t>
             </a:r>
@@ -12800,7 +12800,7 @@
                 <a:solidFill>
                   <a:srgbClr val="5C6552"/>
                 </a:solidFill>
-                <a:latin typeface="Karla"/>
+                <a:latin typeface="Calibri"/>
               </a:rPr>
               <a:t>[ Your question again, so the room remembers it ]</a:t>
             </a:r>
@@ -12838,11 +12838,11 @@
               </a:spcAft>
             </a:pPr>
             <a:r>
-              <a:rPr sz="3400" b="1" i="0">
+              <a:rPr sz="3400" b="0" i="0">
                 <a:solidFill>
                   <a:srgbClr val="974F16"/>
                 </a:solidFill>
-                <a:latin typeface="Libre Caslon Display"/>
+                <a:latin typeface="Georgia"/>
               </a:rPr>
               <a:t>[ The answer ]</a:t>
             </a:r>
@@ -12974,7 +12974,7 @@
                 <a:solidFill>
                   <a:srgbClr val="2E3436"/>
                 </a:solidFill>
-                <a:latin typeface="Karla"/>
+                <a:latin typeface="Calibri"/>
               </a:rPr>
               <a:t>[ One line on why, if there is something worth knowing ]</a:t>
             </a:r>
@@ -13016,7 +13016,7 @@
                 <a:solidFill>
                   <a:srgbClr val="5C6552"/>
                 </a:solidFill>
-                <a:latin typeface="Karla"/>
+                <a:latin typeface="Calibri"/>
               </a:rPr>
               <a:t>Duplicate this slide for each of your own questions and drag it in after the answer to question 10.</a:t>
             </a:r>
@@ -13082,7 +13082,7 @@
                 <a:solidFill>
                   <a:srgbClr val="8B9179"/>
                 </a:solidFill>
-                <a:latin typeface="Karla"/>
+                <a:latin typeface="Calibri"/>
               </a:rPr>
               <a:t>The Pastoral Guide</a:t>
             </a:r>
@@ -13124,7 +13124,7 @@
                 <a:solidFill>
                   <a:srgbClr val="8B9179"/>
                 </a:solidFill>
-                <a:latin typeface="Karla"/>
+                <a:latin typeface="Calibri"/>
               </a:rPr>
               <a:t>27 / 27</a:t>
             </a:r>
@@ -13228,7 +13228,7 @@
                 <a:solidFill>
                   <a:srgbClr val="974F16"/>
                 </a:solidFill>
-                <a:latin typeface="Karla"/>
+                <a:latin typeface="Calibri"/>
               </a:rPr>
               <a:t>THE FORM TIME QUIZ  ·  ROUND ONE  ·  QUESTION 1 OF 10</a:t>
             </a:r>
@@ -13404,7 +13404,7 @@
                 <a:solidFill>
                   <a:srgbClr val="FFFDF7"/>
                 </a:solidFill>
-                <a:latin typeface="Karla"/>
+                <a:latin typeface="Calibri"/>
               </a:rPr>
               <a:t>1</a:t>
             </a:r>
@@ -13442,11 +13442,11 @@
               </a:spcAft>
             </a:pPr>
             <a:r>
-              <a:rPr sz="2400" b="1" i="0">
+              <a:rPr sz="2400" b="0" i="0">
                 <a:solidFill>
                   <a:srgbClr val="974F16"/>
                 </a:solidFill>
-                <a:latin typeface="Libre Caslon Display"/>
+                <a:latin typeface="Georgia"/>
               </a:rPr>
               <a:t>How much sleep do most teenagers need a night?</a:t>
             </a:r>
@@ -13488,7 +13488,7 @@
                 <a:solidFill>
                   <a:srgbClr val="8B9179"/>
                 </a:solidFill>
-                <a:latin typeface="Karla"/>
+                <a:latin typeface="Calibri"/>
               </a:rPr>
               <a:t>ONE OF THESE</a:t>
             </a:r>
@@ -13664,7 +13664,7 @@
                 <a:solidFill>
                   <a:srgbClr val="FFFDF7"/>
                 </a:solidFill>
-                <a:latin typeface="Karla"/>
+                <a:latin typeface="Calibri"/>
               </a:rPr>
               <a:t>A</a:t>
             </a:r>
@@ -13706,7 +13706,7 @@
                 <a:solidFill>
                   <a:srgbClr val="2E3436"/>
                 </a:solidFill>
-                <a:latin typeface="Karla"/>
+                <a:latin typeface="Calibri"/>
               </a:rPr>
               <a:t>6 to 7 hours</a:t>
             </a:r>
@@ -13882,7 +13882,7 @@
                 <a:solidFill>
                   <a:srgbClr val="FFFDF7"/>
                 </a:solidFill>
-                <a:latin typeface="Karla"/>
+                <a:latin typeface="Calibri"/>
               </a:rPr>
               <a:t>B</a:t>
             </a:r>
@@ -13924,7 +13924,7 @@
                 <a:solidFill>
                   <a:srgbClr val="2E3436"/>
                 </a:solidFill>
-                <a:latin typeface="Karla"/>
+                <a:latin typeface="Calibri"/>
               </a:rPr>
               <a:t>8 to 10 hours</a:t>
             </a:r>
@@ -14100,7 +14100,7 @@
                 <a:solidFill>
                   <a:srgbClr val="FFFDF7"/>
                 </a:solidFill>
-                <a:latin typeface="Karla"/>
+                <a:latin typeface="Calibri"/>
               </a:rPr>
               <a:t>C</a:t>
             </a:r>
@@ -14142,7 +14142,7 @@
                 <a:solidFill>
                   <a:srgbClr val="2E3436"/>
                 </a:solidFill>
-                <a:latin typeface="Karla"/>
+                <a:latin typeface="Calibri"/>
               </a:rPr>
               <a:t>11 to 12 hours</a:t>
             </a:r>
@@ -14184,7 +14184,7 @@
                 <a:solidFill>
                   <a:srgbClr val="5C6552"/>
                 </a:solidFill>
-                <a:latin typeface="Karla"/>
+                <a:latin typeface="Calibri"/>
               </a:rPr>
               <a:t>Agree it as a team, then tick it on the sheet.</a:t>
             </a:r>
@@ -14250,7 +14250,7 @@
                 <a:solidFill>
                   <a:srgbClr val="8B9179"/>
                 </a:solidFill>
-                <a:latin typeface="Karla"/>
+                <a:latin typeface="Calibri"/>
               </a:rPr>
               <a:t>The Pastoral Guide</a:t>
             </a:r>
@@ -14292,7 +14292,7 @@
                 <a:solidFill>
                   <a:srgbClr val="8B9179"/>
                 </a:solidFill>
-                <a:latin typeface="Karla"/>
+                <a:latin typeface="Calibri"/>
               </a:rPr>
               <a:t>3 / 27</a:t>
             </a:r>
@@ -14396,7 +14396,7 @@
                 <a:solidFill>
                   <a:srgbClr val="974F16"/>
                 </a:solidFill>
-                <a:latin typeface="Karla"/>
+                <a:latin typeface="Calibri"/>
               </a:rPr>
               <a:t>THE FORM TIME QUIZ  ·  ROUND ONE  ·  QUESTION 2 OF 10</a:t>
             </a:r>
@@ -14572,7 +14572,7 @@
                 <a:solidFill>
                   <a:srgbClr val="FFFDF7"/>
                 </a:solidFill>
-                <a:latin typeface="Karla"/>
+                <a:latin typeface="Calibri"/>
               </a:rPr>
               <a:t>2</a:t>
             </a:r>
@@ -14610,11 +14610,11 @@
               </a:spcAft>
             </a:pPr>
             <a:r>
-              <a:rPr sz="2400" b="1" i="0">
+              <a:rPr sz="2400" b="0" i="0">
                 <a:solidFill>
                   <a:srgbClr val="974F16"/>
                 </a:solidFill>
-                <a:latin typeface="Libre Caslon Display"/>
+                <a:latin typeface="Georgia"/>
               </a:rPr>
               <a:t>Your body clock shifts later when you are a teenager, so feeling wide awake late at night is normal.</a:t>
             </a:r>
@@ -14656,7 +14656,7 @@
                 <a:solidFill>
                   <a:srgbClr val="8B9179"/>
                 </a:solidFill>
-                <a:latin typeface="Karla"/>
+                <a:latin typeface="Calibri"/>
               </a:rPr>
               <a:t>FACT OR MYTH?</a:t>
             </a:r>
@@ -14784,11 +14784,11 @@
               </a:spcAft>
             </a:pPr>
             <a:r>
-              <a:rPr sz="2000" b="1" i="0">
+              <a:rPr sz="2000" b="0" i="0">
                 <a:solidFill>
                   <a:srgbClr val="974F16"/>
                 </a:solidFill>
-                <a:latin typeface="Libre Caslon Display"/>
+                <a:latin typeface="Georgia"/>
               </a:rPr>
               <a:t>Fact</a:t>
             </a:r>
@@ -14916,11 +14916,11 @@
               </a:spcAft>
             </a:pPr>
             <a:r>
-              <a:rPr sz="2000" b="1" i="0">
+              <a:rPr sz="2000" b="0" i="0">
                 <a:solidFill>
                   <a:srgbClr val="974F16"/>
                 </a:solidFill>
-                <a:latin typeface="Libre Caslon Display"/>
+                <a:latin typeface="Georgia"/>
               </a:rPr>
               <a:t>Myth</a:t>
             </a:r>
@@ -14962,7 +14962,7 @@
                 <a:solidFill>
                   <a:srgbClr val="5C6552"/>
                 </a:solidFill>
-                <a:latin typeface="Karla"/>
+                <a:latin typeface="Calibri"/>
               </a:rPr>
               <a:t>Agree it as a team, then tick it on the sheet.</a:t>
             </a:r>
@@ -15028,7 +15028,7 @@
                 <a:solidFill>
                   <a:srgbClr val="8B9179"/>
                 </a:solidFill>
-                <a:latin typeface="Karla"/>
+                <a:latin typeface="Calibri"/>
               </a:rPr>
               <a:t>The Pastoral Guide</a:t>
             </a:r>
@@ -15070,7 +15070,7 @@
                 <a:solidFill>
                   <a:srgbClr val="8B9179"/>
                 </a:solidFill>
-                <a:latin typeface="Karla"/>
+                <a:latin typeface="Calibri"/>
               </a:rPr>
               <a:t>4 / 27</a:t>
             </a:r>
@@ -15174,7 +15174,7 @@
                 <a:solidFill>
                   <a:srgbClr val="974F16"/>
                 </a:solidFill>
-                <a:latin typeface="Karla"/>
+                <a:latin typeface="Calibri"/>
               </a:rPr>
               <a:t>THE FORM TIME QUIZ  ·  ROUND ONE  ·  QUESTION 3 OF 10</a:t>
             </a:r>
@@ -15350,7 +15350,7 @@
                 <a:solidFill>
                   <a:srgbClr val="FFFDF7"/>
                 </a:solidFill>
-                <a:latin typeface="Karla"/>
+                <a:latin typeface="Calibri"/>
               </a:rPr>
               <a:t>3</a:t>
             </a:r>
@@ -15388,11 +15388,11 @@
               </a:spcAft>
             </a:pPr>
             <a:r>
-              <a:rPr sz="2400" b="1" i="0">
+              <a:rPr sz="2400" b="0" i="0">
                 <a:solidFill>
                   <a:srgbClr val="974F16"/>
                 </a:solidFill>
-                <a:latin typeface="Libre Caslon Display"/>
+                <a:latin typeface="Georgia"/>
               </a:rPr>
               <a:t>Cracking your knuckles gives you arthritis.</a:t>
             </a:r>
@@ -15434,7 +15434,7 @@
                 <a:solidFill>
                   <a:srgbClr val="8B9179"/>
                 </a:solidFill>
-                <a:latin typeface="Karla"/>
+                <a:latin typeface="Calibri"/>
               </a:rPr>
               <a:t>FACT OR MYTH?</a:t>
             </a:r>
@@ -15562,11 +15562,11 @@
               </a:spcAft>
             </a:pPr>
             <a:r>
-              <a:rPr sz="2000" b="1" i="0">
+              <a:rPr sz="2000" b="0" i="0">
                 <a:solidFill>
                   <a:srgbClr val="974F16"/>
                 </a:solidFill>
-                <a:latin typeface="Libre Caslon Display"/>
+                <a:latin typeface="Georgia"/>
               </a:rPr>
               <a:t>Fact</a:t>
             </a:r>
@@ -15694,11 +15694,11 @@
               </a:spcAft>
             </a:pPr>
             <a:r>
-              <a:rPr sz="2000" b="1" i="0">
+              <a:rPr sz="2000" b="0" i="0">
                 <a:solidFill>
                   <a:srgbClr val="974F16"/>
                 </a:solidFill>
-                <a:latin typeface="Libre Caslon Display"/>
+                <a:latin typeface="Georgia"/>
               </a:rPr>
               <a:t>Myth</a:t>
             </a:r>
@@ -15740,7 +15740,7 @@
                 <a:solidFill>
                   <a:srgbClr val="5C6552"/>
                 </a:solidFill>
-                <a:latin typeface="Karla"/>
+                <a:latin typeface="Calibri"/>
               </a:rPr>
               <a:t>Agree it as a team, then tick it on the sheet.</a:t>
             </a:r>
@@ -15806,7 +15806,7 @@
                 <a:solidFill>
                   <a:srgbClr val="8B9179"/>
                 </a:solidFill>
-                <a:latin typeface="Karla"/>
+                <a:latin typeface="Calibri"/>
               </a:rPr>
               <a:t>The Pastoral Guide</a:t>
             </a:r>
@@ -15848,7 +15848,7 @@
                 <a:solidFill>
                   <a:srgbClr val="8B9179"/>
                 </a:solidFill>
-                <a:latin typeface="Karla"/>
+                <a:latin typeface="Calibri"/>
               </a:rPr>
               <a:t>5 / 27</a:t>
             </a:r>
@@ -15952,7 +15952,7 @@
                 <a:solidFill>
                   <a:srgbClr val="974F16"/>
                 </a:solidFill>
-                <a:latin typeface="Karla"/>
+                <a:latin typeface="Calibri"/>
               </a:rPr>
               <a:t>THE FORM TIME QUIZ  ·  ROUND ONE  ·  QUESTION 4 OF 10</a:t>
             </a:r>
@@ -16128,7 +16128,7 @@
                 <a:solidFill>
                   <a:srgbClr val="FFFDF7"/>
                 </a:solidFill>
-                <a:latin typeface="Karla"/>
+                <a:latin typeface="Calibri"/>
               </a:rPr>
               <a:t>4</a:t>
             </a:r>
@@ -16166,11 +16166,11 @@
               </a:spcAft>
             </a:pPr>
             <a:r>
-              <a:rPr sz="2400" b="1" i="0">
+              <a:rPr sz="2400" b="0" i="0">
                 <a:solidFill>
                   <a:srgbClr val="974F16"/>
                 </a:solidFill>
-                <a:latin typeface="Libre Caslon Display"/>
+                <a:latin typeface="Georgia"/>
               </a:rPr>
               <a:t>How long should you brush your teeth for?</a:t>
             </a:r>
@@ -16212,7 +16212,7 @@
                 <a:solidFill>
                   <a:srgbClr val="8B9179"/>
                 </a:solidFill>
-                <a:latin typeface="Karla"/>
+                <a:latin typeface="Calibri"/>
               </a:rPr>
               <a:t>ONE OF THESE</a:t>
             </a:r>
@@ -16388,7 +16388,7 @@
                 <a:solidFill>
                   <a:srgbClr val="FFFDF7"/>
                 </a:solidFill>
-                <a:latin typeface="Karla"/>
+                <a:latin typeface="Calibri"/>
               </a:rPr>
               <a:t>A</a:t>
             </a:r>
@@ -16430,7 +16430,7 @@
                 <a:solidFill>
                   <a:srgbClr val="2E3436"/>
                 </a:solidFill>
-                <a:latin typeface="Karla"/>
+                <a:latin typeface="Calibri"/>
               </a:rPr>
               <a:t>30 seconds</a:t>
             </a:r>
@@ -16606,7 +16606,7 @@
                 <a:solidFill>
                   <a:srgbClr val="FFFDF7"/>
                 </a:solidFill>
-                <a:latin typeface="Karla"/>
+                <a:latin typeface="Calibri"/>
               </a:rPr>
               <a:t>B</a:t>
             </a:r>
@@ -16648,7 +16648,7 @@
                 <a:solidFill>
                   <a:srgbClr val="2E3436"/>
                 </a:solidFill>
-                <a:latin typeface="Karla"/>
+                <a:latin typeface="Calibri"/>
               </a:rPr>
               <a:t>Two minutes</a:t>
             </a:r>
@@ -16824,7 +16824,7 @@
                 <a:solidFill>
                   <a:srgbClr val="FFFDF7"/>
                 </a:solidFill>
-                <a:latin typeface="Karla"/>
+                <a:latin typeface="Calibri"/>
               </a:rPr>
               <a:t>C</a:t>
             </a:r>
@@ -16866,7 +16866,7 @@
                 <a:solidFill>
                   <a:srgbClr val="2E3436"/>
                 </a:solidFill>
-                <a:latin typeface="Karla"/>
+                <a:latin typeface="Calibri"/>
               </a:rPr>
               <a:t>Five minutes</a:t>
             </a:r>
@@ -16908,7 +16908,7 @@
                 <a:solidFill>
                   <a:srgbClr val="5C6552"/>
                 </a:solidFill>
-                <a:latin typeface="Karla"/>
+                <a:latin typeface="Calibri"/>
               </a:rPr>
               <a:t>Agree it as a team, then tick it on the sheet.</a:t>
             </a:r>
@@ -16974,7 +16974,7 @@
                 <a:solidFill>
                   <a:srgbClr val="8B9179"/>
                 </a:solidFill>
-                <a:latin typeface="Karla"/>
+                <a:latin typeface="Calibri"/>
               </a:rPr>
               <a:t>The Pastoral Guide</a:t>
             </a:r>
@@ -17016,7 +17016,7 @@
                 <a:solidFill>
                   <a:srgbClr val="8B9179"/>
                 </a:solidFill>
-                <a:latin typeface="Karla"/>
+                <a:latin typeface="Calibri"/>
               </a:rPr>
               <a:t>6 / 27</a:t>
             </a:r>
@@ -17120,7 +17120,7 @@
                 <a:solidFill>
                   <a:srgbClr val="974F16"/>
                 </a:solidFill>
-                <a:latin typeface="Karla"/>
+                <a:latin typeface="Calibri"/>
               </a:rPr>
               <a:t>THE FORM TIME QUIZ  ·  ROUND ONE  ·  QUESTION 5 OF 10</a:t>
             </a:r>
@@ -17296,7 +17296,7 @@
                 <a:solidFill>
                   <a:srgbClr val="FFFDF7"/>
                 </a:solidFill>
-                <a:latin typeface="Karla"/>
+                <a:latin typeface="Calibri"/>
               </a:rPr>
               <a:t>5</a:t>
             </a:r>
@@ -17334,11 +17334,11 @@
               </a:spcAft>
             </a:pPr>
             <a:r>
-              <a:rPr sz="2400" b="1" i="0">
+              <a:rPr sz="2400" b="0" i="0">
                 <a:solidFill>
                   <a:srgbClr val="974F16"/>
                 </a:solidFill>
-                <a:latin typeface="Libre Caslon Display"/>
+                <a:latin typeface="Georgia"/>
               </a:rPr>
               <a:t>Eating carrots lets you see in the dark.</a:t>
             </a:r>
@@ -17380,7 +17380,7 @@
                 <a:solidFill>
                   <a:srgbClr val="8B9179"/>
                 </a:solidFill>
-                <a:latin typeface="Karla"/>
+                <a:latin typeface="Calibri"/>
               </a:rPr>
               <a:t>FACT OR MYTH?</a:t>
             </a:r>
@@ -17508,11 +17508,11 @@
               </a:spcAft>
             </a:pPr>
             <a:r>
-              <a:rPr sz="2000" b="1" i="0">
+              <a:rPr sz="2000" b="0" i="0">
                 <a:solidFill>
                   <a:srgbClr val="974F16"/>
                 </a:solidFill>
-                <a:latin typeface="Libre Caslon Display"/>
+                <a:latin typeface="Georgia"/>
               </a:rPr>
               <a:t>Fact</a:t>
             </a:r>
@@ -17640,11 +17640,11 @@
               </a:spcAft>
             </a:pPr>
             <a:r>
-              <a:rPr sz="2000" b="1" i="0">
+              <a:rPr sz="2000" b="0" i="0">
                 <a:solidFill>
                   <a:srgbClr val="974F16"/>
                 </a:solidFill>
-                <a:latin typeface="Libre Caslon Display"/>
+                <a:latin typeface="Georgia"/>
               </a:rPr>
               <a:t>Myth</a:t>
             </a:r>
@@ -17686,7 +17686,7 @@
                 <a:solidFill>
                   <a:srgbClr val="5C6552"/>
                 </a:solidFill>
-                <a:latin typeface="Karla"/>
+                <a:latin typeface="Calibri"/>
               </a:rPr>
               <a:t>Agree it as a team, then tick it on the sheet.</a:t>
             </a:r>
@@ -17752,7 +17752,7 @@
                 <a:solidFill>
                   <a:srgbClr val="8B9179"/>
                 </a:solidFill>
-                <a:latin typeface="Karla"/>
+                <a:latin typeface="Calibri"/>
               </a:rPr>
               <a:t>The Pastoral Guide</a:t>
             </a:r>
@@ -17794,7 +17794,7 @@
                 <a:solidFill>
                   <a:srgbClr val="8B9179"/>
                 </a:solidFill>
-                <a:latin typeface="Karla"/>
+                <a:latin typeface="Calibri"/>
               </a:rPr>
               <a:t>7 / 27</a:t>
             </a:r>
@@ -17898,7 +17898,7 @@
                 <a:solidFill>
                   <a:srgbClr val="974F16"/>
                 </a:solidFill>
-                <a:latin typeface="Karla"/>
+                <a:latin typeface="Calibri"/>
               </a:rPr>
               <a:t>THE FORM TIME QUIZ  ·  ROUND ONE  ·  QUESTION 6 OF 10</a:t>
             </a:r>
@@ -18074,7 +18074,7 @@
                 <a:solidFill>
                   <a:srgbClr val="FFFDF7"/>
                 </a:solidFill>
-                <a:latin typeface="Karla"/>
+                <a:latin typeface="Calibri"/>
               </a:rPr>
               <a:t>6</a:t>
             </a:r>
@@ -18112,11 +18112,11 @@
               </a:spcAft>
             </a:pPr>
             <a:r>
-              <a:rPr sz="2400" b="1" i="0">
+              <a:rPr sz="2400" b="0" i="0">
                 <a:solidFill>
                   <a:srgbClr val="974F16"/>
                 </a:solidFill>
-                <a:latin typeface="Libre Caslon Display"/>
+                <a:latin typeface="Georgia"/>
               </a:rPr>
               <a:t>Your brain keeps working on what you learned that day while you sleep.</a:t>
             </a:r>
@@ -18158,7 +18158,7 @@
                 <a:solidFill>
                   <a:srgbClr val="8B9179"/>
                 </a:solidFill>
-                <a:latin typeface="Karla"/>
+                <a:latin typeface="Calibri"/>
               </a:rPr>
               <a:t>FACT OR MYTH?</a:t>
             </a:r>
@@ -18286,11 +18286,11 @@
               </a:spcAft>
             </a:pPr>
             <a:r>
-              <a:rPr sz="2000" b="1" i="0">
+              <a:rPr sz="2000" b="0" i="0">
                 <a:solidFill>
                   <a:srgbClr val="974F16"/>
                 </a:solidFill>
-                <a:latin typeface="Libre Caslon Display"/>
+                <a:latin typeface="Georgia"/>
               </a:rPr>
               <a:t>Fact</a:t>
             </a:r>
@@ -18418,11 +18418,11 @@
               </a:spcAft>
             </a:pPr>
             <a:r>
-              <a:rPr sz="2000" b="1" i="0">
+              <a:rPr sz="2000" b="0" i="0">
                 <a:solidFill>
                   <a:srgbClr val="974F16"/>
                 </a:solidFill>
-                <a:latin typeface="Libre Caslon Display"/>
+                <a:latin typeface="Georgia"/>
               </a:rPr>
               <a:t>Myth</a:t>
             </a:r>
@@ -18464,7 +18464,7 @@
                 <a:solidFill>
                   <a:srgbClr val="5C6552"/>
                 </a:solidFill>
-                <a:latin typeface="Karla"/>
+                <a:latin typeface="Calibri"/>
               </a:rPr>
               <a:t>Agree it as a team, then tick it on the sheet.</a:t>
             </a:r>
@@ -18530,7 +18530,7 @@
                 <a:solidFill>
                   <a:srgbClr val="8B9179"/>
                 </a:solidFill>
-                <a:latin typeface="Karla"/>
+                <a:latin typeface="Calibri"/>
               </a:rPr>
               <a:t>The Pastoral Guide</a:t>
             </a:r>
@@ -18572,7 +18572,7 @@
                 <a:solidFill>
                   <a:srgbClr val="8B9179"/>
                 </a:solidFill>
-                <a:latin typeface="Karla"/>
+                <a:latin typeface="Calibri"/>
               </a:rPr>
               <a:t>8 / 27</a:t>
             </a:r>
@@ -18689,7 +18689,7 @@
                 <a:solidFill>
                   <a:srgbClr val="974F16"/>
                 </a:solidFill>
-                <a:latin typeface="Karla"/>
+                <a:latin typeface="Calibri"/>
               </a:rPr>
               <a:t>ROUND TWO</a:t>
             </a:r>
@@ -18727,11 +18727,11 @@
               </a:spcAft>
             </a:pPr>
             <a:r>
-              <a:rPr sz="4000" b="1" i="0">
+              <a:rPr sz="4000" b="0" i="0">
                 <a:solidFill>
                   <a:srgbClr val="FFFDF7"/>
                 </a:solidFill>
-                <a:latin typeface="Libre Caslon Display"/>
+                <a:latin typeface="Georgia"/>
               </a:rPr>
               <a:t>General knowledge</a:t>
             </a:r>
@@ -18817,7 +18817,7 @@
                 <a:solidFill>
                   <a:srgbClr val="EBCDAE"/>
                 </a:solidFill>
-                <a:latin typeface="Karla"/>
+                <a:latin typeface="Calibri"/>
               </a:rPr>
               <a:t>Four questions to finish. Some have options, and some you will have to write out in full.</a:t>
             </a:r>
@@ -18883,7 +18883,7 @@
                 <a:solidFill>
                   <a:srgbClr val="EBCDAE"/>
                 </a:solidFill>
-                <a:latin typeface="Karla"/>
+                <a:latin typeface="Calibri"/>
               </a:rPr>
               <a:t>The Pastoral Guide</a:t>
             </a:r>
@@ -18925,7 +18925,7 @@
                 <a:solidFill>
                   <a:srgbClr val="EBCDAE"/>
                 </a:solidFill>
-                <a:latin typeface="Karla"/>
+                <a:latin typeface="Calibri"/>
               </a:rPr>
               <a:t>9 / 27</a:t>
             </a:r>
